--- a/Presentazione_CIFAR10.pptx
+++ b/Presentazione_CIFAR10.pptx
@@ -357,7 +357,7 @@
           <a:p>
             <a:fld id="{5BCAD085-E8A6-8845-BD4E-CB4CCA059FC4}" type="datetimeFigureOut">
               <a:rPr lang="en-US" smtClean="0"/>
-              <a:t>4/30/2025</a:t>
+              <a:t>5/1/2025</a:t>
             </a:fld>
             <a:endParaRPr lang="en-US"/>
           </a:p>
@@ -527,7 +527,7 @@
           <a:p>
             <a:fld id="{5BCAD085-E8A6-8845-BD4E-CB4CCA059FC4}" type="datetimeFigureOut">
               <a:rPr lang="en-US" smtClean="0"/>
-              <a:t>4/30/2025</a:t>
+              <a:t>5/1/2025</a:t>
             </a:fld>
             <a:endParaRPr lang="en-US"/>
           </a:p>
@@ -707,7 +707,7 @@
           <a:p>
             <a:fld id="{5BCAD085-E8A6-8845-BD4E-CB4CCA059FC4}" type="datetimeFigureOut">
               <a:rPr lang="en-US" smtClean="0"/>
-              <a:t>4/30/2025</a:t>
+              <a:t>5/1/2025</a:t>
             </a:fld>
             <a:endParaRPr lang="en-US"/>
           </a:p>
@@ -877,7 +877,7 @@
           <a:p>
             <a:fld id="{5BCAD085-E8A6-8845-BD4E-CB4CCA059FC4}" type="datetimeFigureOut">
               <a:rPr lang="en-US" smtClean="0"/>
-              <a:t>4/30/2025</a:t>
+              <a:t>5/1/2025</a:t>
             </a:fld>
             <a:endParaRPr lang="en-US"/>
           </a:p>
@@ -1135,7 +1135,7 @@
           <a:p>
             <a:fld id="{5BCAD085-E8A6-8845-BD4E-CB4CCA059FC4}" type="datetimeFigureOut">
               <a:rPr lang="en-US" smtClean="0"/>
-              <a:t>4/30/2025</a:t>
+              <a:t>5/1/2025</a:t>
             </a:fld>
             <a:endParaRPr lang="en-US"/>
           </a:p>
@@ -1423,7 +1423,7 @@
           <a:p>
             <a:fld id="{5BCAD085-E8A6-8845-BD4E-CB4CCA059FC4}" type="datetimeFigureOut">
               <a:rPr lang="en-US" smtClean="0"/>
-              <a:t>4/30/2025</a:t>
+              <a:t>5/1/2025</a:t>
             </a:fld>
             <a:endParaRPr lang="en-US"/>
           </a:p>
@@ -1865,7 +1865,7 @@
           <a:p>
             <a:fld id="{5BCAD085-E8A6-8845-BD4E-CB4CCA059FC4}" type="datetimeFigureOut">
               <a:rPr lang="en-US" smtClean="0"/>
-              <a:t>4/30/2025</a:t>
+              <a:t>5/1/2025</a:t>
             </a:fld>
             <a:endParaRPr lang="en-US"/>
           </a:p>
@@ -1983,7 +1983,7 @@
           <a:p>
             <a:fld id="{5BCAD085-E8A6-8845-BD4E-CB4CCA059FC4}" type="datetimeFigureOut">
               <a:rPr lang="en-US" smtClean="0"/>
-              <a:t>4/30/2025</a:t>
+              <a:t>5/1/2025</a:t>
             </a:fld>
             <a:endParaRPr lang="en-US"/>
           </a:p>
@@ -2078,7 +2078,7 @@
           <a:p>
             <a:fld id="{5BCAD085-E8A6-8845-BD4E-CB4CCA059FC4}" type="datetimeFigureOut">
               <a:rPr lang="en-US" smtClean="0"/>
-              <a:t>4/30/2025</a:t>
+              <a:t>5/1/2025</a:t>
             </a:fld>
             <a:endParaRPr lang="en-US"/>
           </a:p>
@@ -2369,7 +2369,7 @@
           <a:p>
             <a:fld id="{5BCAD085-E8A6-8845-BD4E-CB4CCA059FC4}" type="datetimeFigureOut">
               <a:rPr lang="en-US" smtClean="0"/>
-              <a:t>4/30/2025</a:t>
+              <a:t>5/1/2025</a:t>
             </a:fld>
             <a:endParaRPr lang="en-US"/>
           </a:p>
@@ -2645,7 +2645,7 @@
           <a:p>
             <a:fld id="{5BCAD085-E8A6-8845-BD4E-CB4CCA059FC4}" type="datetimeFigureOut">
               <a:rPr lang="en-US" smtClean="0"/>
-              <a:t>4/30/2025</a:t>
+              <a:t>5/1/2025</a:t>
             </a:fld>
             <a:endParaRPr lang="en-US"/>
           </a:p>
@@ -2942,7 +2942,7 @@
           <a:p>
             <a:fld id="{5BCAD085-E8A6-8845-BD4E-CB4CCA059FC4}" type="datetimeFigureOut">
               <a:rPr lang="en-US" smtClean="0"/>
-              <a:t>4/30/2025</a:t>
+              <a:t>5/1/2025</a:t>
             </a:fld>
             <a:endParaRPr lang="en-US"/>
           </a:p>
@@ -4895,7 +4895,28 @@
                 <a:latin typeface="Verdana" panose="020B0604030504040204" pitchFamily="34" charset="0"/>
                 <a:ea typeface="Verdana" panose="020B0604030504040204" pitchFamily="34" charset="0"/>
               </a:rPr>
-              <a:t> (visto l’elevato numero di campioni, della complessità computazionale dovuta alla </a:t>
+              <a:t> a 10000 campioni </a:t>
+            </a:r>
+            <a:r>
+              <a:rPr lang="it-IT" sz="3200" dirty="0" smtClean="0">
+                <a:latin typeface="Verdana" panose="020B0604030504040204" pitchFamily="34" charset="0"/>
+                <a:ea typeface="Verdana" panose="020B0604030504040204" pitchFamily="34" charset="0"/>
+              </a:rPr>
+              <a:t>(visto </a:t>
+            </a:r>
+            <a:r>
+              <a:rPr lang="it-IT" sz="3200" dirty="0" smtClean="0">
+                <a:latin typeface="Verdana" panose="020B0604030504040204" pitchFamily="34" charset="0"/>
+                <a:ea typeface="Verdana" panose="020B0604030504040204" pitchFamily="34" charset="0"/>
+              </a:rPr>
+              <a:t>l’elevata </a:t>
+            </a:r>
+            <a:r>
+              <a:rPr lang="it-IT" sz="3200" dirty="0" smtClean="0">
+                <a:latin typeface="Verdana" panose="020B0604030504040204" pitchFamily="34" charset="0"/>
+                <a:ea typeface="Verdana" panose="020B0604030504040204" pitchFamily="34" charset="0"/>
+              </a:rPr>
+              <a:t>complessità computazionale dovuta alla </a:t>
             </a:r>
             <a:r>
               <a:rPr lang="it-IT" sz="3200" dirty="0" err="1" smtClean="0">
